--- a/slides/Lesson 6 - From Notebook to Python Project.pptx
+++ b/slides/Lesson 6 - From Notebook to Python Project.pptx
@@ -11071,7 +11071,7 @@
                 </a:solidFill>
                 <a:latin typeface="Poppins SemiBold"/>
               </a:rPr>
-              <a:t>retriever.py must not import assistant.py. That is what lets you test searching for free.</a:t>
+              <a:t>retriever.py must not import assistant.py. That is what lets you test searching almost for free.</a:t>
             </a:r>
           </a:p>
           <a:p>
